--- a/1_conditions/1_conditions.pptx
+++ b/1_conditions/1_conditions.pptx
@@ -235,7 +235,7 @@
           <a:p>
             <a:fld id="{85EF5437-F444-4613-A039-4AD69D91C86A}" type="datetimeFigureOut">
               <a:rPr lang="ru-RU" smtClean="0"/>
-              <a:t>08.09.2025</a:t>
+              <a:t>08.09.2026</a:t>
             </a:fld>
             <a:endParaRPr lang="ru-RU"/>
           </a:p>
@@ -2901,7 +2901,7 @@
           <a:p>
             <a:fld id="{58BF7D01-7D49-4F37-AA30-F04C65571A4A}" type="datetimeFigureOut">
               <a:rPr lang="ru-RU" smtClean="0"/>
-              <a:t>08.09.2025</a:t>
+              <a:t>08.09.2026</a:t>
             </a:fld>
             <a:endParaRPr lang="ru-RU"/>
           </a:p>
@@ -3071,7 +3071,7 @@
           <a:p>
             <a:fld id="{58BF7D01-7D49-4F37-AA30-F04C65571A4A}" type="datetimeFigureOut">
               <a:rPr lang="ru-RU" smtClean="0"/>
-              <a:t>08.09.2025</a:t>
+              <a:t>08.09.2026</a:t>
             </a:fld>
             <a:endParaRPr lang="ru-RU"/>
           </a:p>
@@ -3251,7 +3251,7 @@
           <a:p>
             <a:fld id="{58BF7D01-7D49-4F37-AA30-F04C65571A4A}" type="datetimeFigureOut">
               <a:rPr lang="ru-RU" smtClean="0"/>
-              <a:t>08.09.2025</a:t>
+              <a:t>08.09.2026</a:t>
             </a:fld>
             <a:endParaRPr lang="ru-RU"/>
           </a:p>
@@ -3421,7 +3421,7 @@
           <a:p>
             <a:fld id="{58BF7D01-7D49-4F37-AA30-F04C65571A4A}" type="datetimeFigureOut">
               <a:rPr lang="ru-RU" smtClean="0"/>
-              <a:t>08.09.2025</a:t>
+              <a:t>08.09.2026</a:t>
             </a:fld>
             <a:endParaRPr lang="ru-RU"/>
           </a:p>
@@ -3667,7 +3667,7 @@
           <a:p>
             <a:fld id="{58BF7D01-7D49-4F37-AA30-F04C65571A4A}" type="datetimeFigureOut">
               <a:rPr lang="ru-RU" smtClean="0"/>
-              <a:t>08.09.2025</a:t>
+              <a:t>08.09.2026</a:t>
             </a:fld>
             <a:endParaRPr lang="ru-RU"/>
           </a:p>
@@ -3899,7 +3899,7 @@
           <a:p>
             <a:fld id="{58BF7D01-7D49-4F37-AA30-F04C65571A4A}" type="datetimeFigureOut">
               <a:rPr lang="ru-RU" smtClean="0"/>
-              <a:t>08.09.2025</a:t>
+              <a:t>08.09.2026</a:t>
             </a:fld>
             <a:endParaRPr lang="ru-RU"/>
           </a:p>
@@ -4266,7 +4266,7 @@
           <a:p>
             <a:fld id="{58BF7D01-7D49-4F37-AA30-F04C65571A4A}" type="datetimeFigureOut">
               <a:rPr lang="ru-RU" smtClean="0"/>
-              <a:t>08.09.2025</a:t>
+              <a:t>08.09.2026</a:t>
             </a:fld>
             <a:endParaRPr lang="ru-RU"/>
           </a:p>
@@ -4384,7 +4384,7 @@
           <a:p>
             <a:fld id="{58BF7D01-7D49-4F37-AA30-F04C65571A4A}" type="datetimeFigureOut">
               <a:rPr lang="ru-RU" smtClean="0"/>
-              <a:t>08.09.2025</a:t>
+              <a:t>08.09.2026</a:t>
             </a:fld>
             <a:endParaRPr lang="ru-RU"/>
           </a:p>
@@ -4479,7 +4479,7 @@
           <a:p>
             <a:fld id="{58BF7D01-7D49-4F37-AA30-F04C65571A4A}" type="datetimeFigureOut">
               <a:rPr lang="ru-RU" smtClean="0"/>
-              <a:t>08.09.2025</a:t>
+              <a:t>08.09.2026</a:t>
             </a:fld>
             <a:endParaRPr lang="ru-RU"/>
           </a:p>
@@ -4756,7 +4756,7 @@
           <a:p>
             <a:fld id="{58BF7D01-7D49-4F37-AA30-F04C65571A4A}" type="datetimeFigureOut">
               <a:rPr lang="ru-RU" smtClean="0"/>
-              <a:t>08.09.2025</a:t>
+              <a:t>08.09.2026</a:t>
             </a:fld>
             <a:endParaRPr lang="ru-RU"/>
           </a:p>
@@ -5013,7 +5013,7 @@
           <a:p>
             <a:fld id="{58BF7D01-7D49-4F37-AA30-F04C65571A4A}" type="datetimeFigureOut">
               <a:rPr lang="ru-RU" smtClean="0"/>
-              <a:t>08.09.2025</a:t>
+              <a:t>08.09.2026</a:t>
             </a:fld>
             <a:endParaRPr lang="ru-RU"/>
           </a:p>
@@ -5226,7 +5226,7 @@
           <a:p>
             <a:fld id="{58BF7D01-7D49-4F37-AA30-F04C65571A4A}" type="datetimeFigureOut">
               <a:rPr lang="ru-RU" smtClean="0"/>
-              <a:t>08.09.2025</a:t>
+              <a:t>08.09.2026</a:t>
             </a:fld>
             <a:endParaRPr lang="ru-RU"/>
           </a:p>
@@ -6172,7 +6172,7 @@
         <p:spPr>
           <a:xfrm>
             <a:off x="1589313" y="2148888"/>
-            <a:ext cx="2523040" cy="2862322"/>
+            <a:ext cx="2523040" cy="3970318"/>
           </a:xfrm>
           <a:prstGeom prst="rect">
             <a:avLst/>
@@ -6186,62 +6186,216 @@
           <a:lstStyle/>
           <a:p>
             <a:r>
-              <a:rPr lang="en-US" sz="3600" dirty="0">
-                <a:latin typeface="Times New Roman" panose="02020603050405020304" pitchFamily="18" charset="0"/>
-                <a:cs typeface="Times New Roman" panose="02020603050405020304" pitchFamily="18" charset="0"/>
-              </a:rPr>
-              <a:t>if (1)</a:t>
-            </a:r>
-            <a:r>
-              <a:rPr lang="ru-RU" sz="3600" dirty="0">
-                <a:latin typeface="Times New Roman" panose="02020603050405020304" pitchFamily="18" charset="0"/>
-                <a:cs typeface="Times New Roman" panose="02020603050405020304" pitchFamily="18" charset="0"/>
+              <a:rPr lang="en-US" sz="3600" b="0" dirty="0">
+                <a:solidFill>
+                  <a:srgbClr val="C586C0"/>
+                </a:solidFill>
+                <a:effectLst/>
+                <a:latin typeface="Consolas" panose="020B0609020204030204" pitchFamily="49" charset="0"/>
+              </a:rPr>
+              <a:t>if</a:t>
+            </a:r>
+            <a:r>
+              <a:rPr lang="en-US" sz="3600" b="0" dirty="0">
+                <a:solidFill>
+                  <a:srgbClr val="BBBEBF"/>
+                </a:solidFill>
+                <a:effectLst/>
+                <a:latin typeface="Consolas" panose="020B0609020204030204" pitchFamily="49" charset="0"/>
+              </a:rPr>
+              <a:t> (</a:t>
+            </a:r>
+            <a:r>
+              <a:rPr lang="en-US" sz="3600" b="0" dirty="0">
+                <a:solidFill>
+                  <a:srgbClr val="B5CEA8"/>
+                </a:solidFill>
+                <a:effectLst/>
+                <a:latin typeface="Consolas" panose="020B0609020204030204" pitchFamily="49" charset="0"/>
+              </a:rPr>
+              <a:t>1</a:t>
+            </a:r>
+            <a:r>
+              <a:rPr lang="en-US" sz="3600" b="0" dirty="0">
+                <a:solidFill>
+                  <a:srgbClr val="BBBEBF"/>
+                </a:solidFill>
+                <a:effectLst/>
+                <a:latin typeface="Consolas" panose="020B0609020204030204" pitchFamily="49" charset="0"/>
+              </a:rPr>
+              <a:t>) </a:t>
+            </a:r>
+            <a:r>
+              <a:rPr lang="en-US" sz="3600" b="0" dirty="0">
+                <a:solidFill>
+                  <a:srgbClr val="C9D1D9"/>
+                </a:solidFill>
+                <a:effectLst/>
+                <a:latin typeface="Consolas" panose="020B0609020204030204" pitchFamily="49" charset="0"/>
+              </a:rPr>
+              <a:t>{</a:t>
+            </a:r>
+            <a:endParaRPr lang="en-US" sz="3600" b="0" dirty="0">
+              <a:solidFill>
+                <a:srgbClr val="BBBEBF"/>
+              </a:solidFill>
+              <a:effectLst/>
+              <a:latin typeface="Consolas" panose="020B0609020204030204" pitchFamily="49" charset="0"/>
+            </a:endParaRPr>
+          </a:p>
+          <a:p>
+            <a:r>
+              <a:rPr lang="en-US" sz="3600" b="0" dirty="0">
+                <a:solidFill>
+                  <a:srgbClr val="C9D1D9"/>
+                </a:solidFill>
+                <a:effectLst/>
+                <a:latin typeface="Consolas" panose="020B0609020204030204" pitchFamily="49" charset="0"/>
+              </a:rPr>
+              <a:t>    </a:t>
+            </a:r>
+            <a:r>
+              <a:rPr lang="en-US" sz="3600" b="0" dirty="0">
+                <a:solidFill>
+                  <a:srgbClr val="8B949E"/>
+                </a:solidFill>
+                <a:effectLst/>
+                <a:latin typeface="Consolas" panose="020B0609020204030204" pitchFamily="49" charset="0"/>
+              </a:rPr>
+              <a:t>// ?</a:t>
+            </a:r>
+            <a:endParaRPr lang="en-US" sz="3600" b="0" dirty="0">
+              <a:solidFill>
+                <a:srgbClr val="BBBEBF"/>
+              </a:solidFill>
+              <a:effectLst/>
+              <a:latin typeface="Consolas" panose="020B0609020204030204" pitchFamily="49" charset="0"/>
+            </a:endParaRPr>
+          </a:p>
+          <a:p>
+            <a:r>
+              <a:rPr lang="en-US" sz="3600" b="0" dirty="0">
+                <a:solidFill>
+                  <a:srgbClr val="C9D1D9"/>
+                </a:solidFill>
+                <a:effectLst/>
+                <a:latin typeface="Consolas" panose="020B0609020204030204" pitchFamily="49" charset="0"/>
+              </a:rPr>
+              <a:t>}</a:t>
+            </a:r>
+            <a:r>
+              <a:rPr lang="en-US" sz="3600" b="0" dirty="0">
+                <a:solidFill>
+                  <a:srgbClr val="BBBEBF"/>
+                </a:solidFill>
+                <a:effectLst/>
+                <a:latin typeface="Consolas" panose="020B0609020204030204" pitchFamily="49" charset="0"/>
               </a:rPr>
               <a:t> </a:t>
             </a:r>
             <a:r>
-              <a:rPr lang="en-US" sz="3600" dirty="0">
-                <a:latin typeface="Times New Roman" panose="02020603050405020304" pitchFamily="18" charset="0"/>
-                <a:cs typeface="Times New Roman" panose="02020603050405020304" pitchFamily="18" charset="0"/>
+              <a:rPr lang="en-US" sz="3600" b="0" dirty="0">
+                <a:solidFill>
+                  <a:srgbClr val="C586C0"/>
+                </a:solidFill>
+                <a:effectLst/>
+                <a:latin typeface="Consolas" panose="020B0609020204030204" pitchFamily="49" charset="0"/>
+              </a:rPr>
+              <a:t>else</a:t>
+            </a:r>
+            <a:r>
+              <a:rPr lang="en-US" sz="3600" b="0" dirty="0">
+                <a:solidFill>
+                  <a:srgbClr val="BBBEBF"/>
+                </a:solidFill>
+                <a:effectLst/>
+                <a:latin typeface="Consolas" panose="020B0609020204030204" pitchFamily="49" charset="0"/>
+              </a:rPr>
+              <a:t> </a:t>
+            </a:r>
+            <a:r>
+              <a:rPr lang="en-US" sz="3600" b="0" dirty="0">
+                <a:solidFill>
+                  <a:srgbClr val="C9D1D9"/>
+                </a:solidFill>
+                <a:effectLst/>
+                <a:latin typeface="Consolas" panose="020B0609020204030204" pitchFamily="49" charset="0"/>
               </a:rPr>
               <a:t>{</a:t>
             </a:r>
-          </a:p>
-          <a:p>
-            <a:r>
-              <a:rPr lang="en-US" sz="3600" dirty="0">
-                <a:latin typeface="Times New Roman" panose="02020603050405020304" pitchFamily="18" charset="0"/>
-                <a:cs typeface="Times New Roman" panose="02020603050405020304" pitchFamily="18" charset="0"/>
-              </a:rPr>
-              <a:t>	// ?</a:t>
-            </a:r>
-          </a:p>
-          <a:p>
-            <a:r>
-              <a:rPr lang="en-US" sz="3600" dirty="0">
-                <a:latin typeface="Times New Roman" panose="02020603050405020304" pitchFamily="18" charset="0"/>
-                <a:cs typeface="Times New Roman" panose="02020603050405020304" pitchFamily="18" charset="0"/>
-              </a:rPr>
-              <a:t>} else {</a:t>
-            </a:r>
-          </a:p>
-          <a:p>
-            <a:r>
-              <a:rPr lang="en-US" sz="3600" dirty="0">
-                <a:latin typeface="Times New Roman" panose="02020603050405020304" pitchFamily="18" charset="0"/>
-                <a:cs typeface="Times New Roman" panose="02020603050405020304" pitchFamily="18" charset="0"/>
-              </a:rPr>
-              <a:t>	// ?</a:t>
-            </a:r>
-          </a:p>
-          <a:p>
-            <a:r>
-              <a:rPr lang="en-US" sz="3600" dirty="0">
-                <a:latin typeface="Times New Roman" panose="02020603050405020304" pitchFamily="18" charset="0"/>
-                <a:cs typeface="Times New Roman" panose="02020603050405020304" pitchFamily="18" charset="0"/>
+            <a:endParaRPr lang="en-US" sz="3600" b="0" dirty="0">
+              <a:solidFill>
+                <a:srgbClr val="BBBEBF"/>
+              </a:solidFill>
+              <a:effectLst/>
+              <a:latin typeface="Consolas" panose="020B0609020204030204" pitchFamily="49" charset="0"/>
+            </a:endParaRPr>
+          </a:p>
+          <a:p>
+            <a:r>
+              <a:rPr lang="en-US" sz="3600" b="0" dirty="0">
+                <a:solidFill>
+                  <a:srgbClr val="C9D1D9"/>
+                </a:solidFill>
+                <a:effectLst/>
+                <a:latin typeface="Consolas" panose="020B0609020204030204" pitchFamily="49" charset="0"/>
+              </a:rPr>
+              <a:t>    </a:t>
+            </a:r>
+            <a:r>
+              <a:rPr lang="en-US" sz="3600" b="0" dirty="0">
+                <a:solidFill>
+                  <a:srgbClr val="8B949E"/>
+                </a:solidFill>
+                <a:effectLst/>
+                <a:latin typeface="Consolas" panose="020B0609020204030204" pitchFamily="49" charset="0"/>
+              </a:rPr>
+              <a:t>// ?</a:t>
+            </a:r>
+            <a:endParaRPr lang="en-US" sz="3600" b="0" dirty="0">
+              <a:solidFill>
+                <a:srgbClr val="BBBEBF"/>
+              </a:solidFill>
+              <a:effectLst/>
+              <a:latin typeface="Consolas" panose="020B0609020204030204" pitchFamily="49" charset="0"/>
+            </a:endParaRPr>
+          </a:p>
+          <a:p>
+            <a:r>
+              <a:rPr lang="en-US" sz="3600" b="0" dirty="0">
+                <a:solidFill>
+                  <a:srgbClr val="C9D1D9"/>
+                </a:solidFill>
+                <a:effectLst/>
+                <a:latin typeface="Consolas" panose="020B0609020204030204" pitchFamily="49" charset="0"/>
               </a:rPr>
               <a:t>}</a:t>
             </a:r>
+            <a:endParaRPr lang="en-US" sz="3600" b="0" dirty="0">
+              <a:solidFill>
+                <a:srgbClr val="BBBEBF"/>
+              </a:solidFill>
+              <a:effectLst/>
+              <a:latin typeface="Consolas" panose="020B0609020204030204" pitchFamily="49" charset="0"/>
+            </a:endParaRPr>
+          </a:p>
+          <a:p>
+            <a:br>
+              <a:rPr lang="en-US" sz="3600" b="0" dirty="0">
+                <a:solidFill>
+                  <a:srgbClr val="BBBEBF"/>
+                </a:solidFill>
+                <a:effectLst/>
+                <a:latin typeface="Consolas" panose="020B0609020204030204" pitchFamily="49" charset="0"/>
+              </a:rPr>
+            </a:br>
+            <a:endParaRPr lang="en-US" sz="3600" b="0" dirty="0">
+              <a:solidFill>
+                <a:srgbClr val="BBBEBF"/>
+              </a:solidFill>
+              <a:effectLst/>
+              <a:latin typeface="Consolas" panose="020B0609020204030204" pitchFamily="49" charset="0"/>
+            </a:endParaRPr>
           </a:p>
         </p:txBody>
       </p:sp>
@@ -6260,7 +6414,7 @@
         <p:spPr>
           <a:xfrm>
             <a:off x="5105501" y="2075313"/>
-            <a:ext cx="2523040" cy="2862322"/>
+            <a:ext cx="2523040" cy="3970318"/>
           </a:xfrm>
           <a:prstGeom prst="rect">
             <a:avLst/>
@@ -6274,62 +6428,216 @@
           <a:lstStyle/>
           <a:p>
             <a:r>
-              <a:rPr lang="en-US" sz="3600" dirty="0">
-                <a:latin typeface="Times New Roman" panose="02020603050405020304" pitchFamily="18" charset="0"/>
-                <a:cs typeface="Times New Roman" panose="02020603050405020304" pitchFamily="18" charset="0"/>
-              </a:rPr>
-              <a:t>if (0)</a:t>
-            </a:r>
-            <a:r>
-              <a:rPr lang="ru-RU" sz="3600" dirty="0">
-                <a:latin typeface="Times New Roman" panose="02020603050405020304" pitchFamily="18" charset="0"/>
-                <a:cs typeface="Times New Roman" panose="02020603050405020304" pitchFamily="18" charset="0"/>
+              <a:rPr lang="en-US" sz="3600" b="0" dirty="0">
+                <a:solidFill>
+                  <a:srgbClr val="C586C0"/>
+                </a:solidFill>
+                <a:effectLst/>
+                <a:latin typeface="Consolas" panose="020B0609020204030204" pitchFamily="49" charset="0"/>
+              </a:rPr>
+              <a:t>if</a:t>
+            </a:r>
+            <a:r>
+              <a:rPr lang="en-US" sz="3600" b="0" dirty="0">
+                <a:solidFill>
+                  <a:srgbClr val="BBBEBF"/>
+                </a:solidFill>
+                <a:effectLst/>
+                <a:latin typeface="Consolas" panose="020B0609020204030204" pitchFamily="49" charset="0"/>
+              </a:rPr>
+              <a:t> (</a:t>
+            </a:r>
+            <a:r>
+              <a:rPr lang="en-US" sz="3600" b="0" dirty="0">
+                <a:solidFill>
+                  <a:srgbClr val="B5CEA8"/>
+                </a:solidFill>
+                <a:effectLst/>
+                <a:latin typeface="Consolas" panose="020B0609020204030204" pitchFamily="49" charset="0"/>
+              </a:rPr>
+              <a:t>0</a:t>
+            </a:r>
+            <a:r>
+              <a:rPr lang="en-US" sz="3600" b="0" dirty="0">
+                <a:solidFill>
+                  <a:srgbClr val="BBBEBF"/>
+                </a:solidFill>
+                <a:effectLst/>
+                <a:latin typeface="Consolas" panose="020B0609020204030204" pitchFamily="49" charset="0"/>
+              </a:rPr>
+              <a:t>) </a:t>
+            </a:r>
+            <a:r>
+              <a:rPr lang="en-US" sz="3600" b="0" dirty="0">
+                <a:solidFill>
+                  <a:srgbClr val="C9D1D9"/>
+                </a:solidFill>
+                <a:effectLst/>
+                <a:latin typeface="Consolas" panose="020B0609020204030204" pitchFamily="49" charset="0"/>
+              </a:rPr>
+              <a:t>{</a:t>
+            </a:r>
+            <a:endParaRPr lang="en-US" sz="3600" b="0" dirty="0">
+              <a:solidFill>
+                <a:srgbClr val="BBBEBF"/>
+              </a:solidFill>
+              <a:effectLst/>
+              <a:latin typeface="Consolas" panose="020B0609020204030204" pitchFamily="49" charset="0"/>
+            </a:endParaRPr>
+          </a:p>
+          <a:p>
+            <a:r>
+              <a:rPr lang="en-US" sz="3600" b="0" dirty="0">
+                <a:solidFill>
+                  <a:srgbClr val="C9D1D9"/>
+                </a:solidFill>
+                <a:effectLst/>
+                <a:latin typeface="Consolas" panose="020B0609020204030204" pitchFamily="49" charset="0"/>
+              </a:rPr>
+              <a:t>    </a:t>
+            </a:r>
+            <a:r>
+              <a:rPr lang="en-US" sz="3600" b="0" dirty="0">
+                <a:solidFill>
+                  <a:srgbClr val="8B949E"/>
+                </a:solidFill>
+                <a:effectLst/>
+                <a:latin typeface="Consolas" panose="020B0609020204030204" pitchFamily="49" charset="0"/>
+              </a:rPr>
+              <a:t>// ?</a:t>
+            </a:r>
+            <a:endParaRPr lang="en-US" sz="3600" b="0" dirty="0">
+              <a:solidFill>
+                <a:srgbClr val="BBBEBF"/>
+              </a:solidFill>
+              <a:effectLst/>
+              <a:latin typeface="Consolas" panose="020B0609020204030204" pitchFamily="49" charset="0"/>
+            </a:endParaRPr>
+          </a:p>
+          <a:p>
+            <a:r>
+              <a:rPr lang="en-US" sz="3600" b="0" dirty="0">
+                <a:solidFill>
+                  <a:srgbClr val="C9D1D9"/>
+                </a:solidFill>
+                <a:effectLst/>
+                <a:latin typeface="Consolas" panose="020B0609020204030204" pitchFamily="49" charset="0"/>
+              </a:rPr>
+              <a:t>}</a:t>
+            </a:r>
+            <a:r>
+              <a:rPr lang="en-US" sz="3600" b="0" dirty="0">
+                <a:solidFill>
+                  <a:srgbClr val="BBBEBF"/>
+                </a:solidFill>
+                <a:effectLst/>
+                <a:latin typeface="Consolas" panose="020B0609020204030204" pitchFamily="49" charset="0"/>
               </a:rPr>
               <a:t> </a:t>
             </a:r>
             <a:r>
-              <a:rPr lang="en-US" sz="3600" dirty="0">
-                <a:latin typeface="Times New Roman" panose="02020603050405020304" pitchFamily="18" charset="0"/>
-                <a:cs typeface="Times New Roman" panose="02020603050405020304" pitchFamily="18" charset="0"/>
+              <a:rPr lang="en-US" sz="3600" b="0" dirty="0">
+                <a:solidFill>
+                  <a:srgbClr val="C586C0"/>
+                </a:solidFill>
+                <a:effectLst/>
+                <a:latin typeface="Consolas" panose="020B0609020204030204" pitchFamily="49" charset="0"/>
+              </a:rPr>
+              <a:t>else</a:t>
+            </a:r>
+            <a:r>
+              <a:rPr lang="en-US" sz="3600" b="0" dirty="0">
+                <a:solidFill>
+                  <a:srgbClr val="BBBEBF"/>
+                </a:solidFill>
+                <a:effectLst/>
+                <a:latin typeface="Consolas" panose="020B0609020204030204" pitchFamily="49" charset="0"/>
+              </a:rPr>
+              <a:t> </a:t>
+            </a:r>
+            <a:r>
+              <a:rPr lang="en-US" sz="3600" b="0" dirty="0">
+                <a:solidFill>
+                  <a:srgbClr val="C9D1D9"/>
+                </a:solidFill>
+                <a:effectLst/>
+                <a:latin typeface="Consolas" panose="020B0609020204030204" pitchFamily="49" charset="0"/>
               </a:rPr>
               <a:t>{</a:t>
             </a:r>
-          </a:p>
-          <a:p>
-            <a:r>
-              <a:rPr lang="en-US" sz="3600" dirty="0">
-                <a:latin typeface="Times New Roman" panose="02020603050405020304" pitchFamily="18" charset="0"/>
-                <a:cs typeface="Times New Roman" panose="02020603050405020304" pitchFamily="18" charset="0"/>
-              </a:rPr>
-              <a:t>	// ?</a:t>
-            </a:r>
-          </a:p>
-          <a:p>
-            <a:r>
-              <a:rPr lang="en-US" sz="3600" dirty="0">
-                <a:latin typeface="Times New Roman" panose="02020603050405020304" pitchFamily="18" charset="0"/>
-                <a:cs typeface="Times New Roman" panose="02020603050405020304" pitchFamily="18" charset="0"/>
-              </a:rPr>
-              <a:t>} else {</a:t>
-            </a:r>
-          </a:p>
-          <a:p>
-            <a:r>
-              <a:rPr lang="en-US" sz="3600" dirty="0">
-                <a:latin typeface="Times New Roman" panose="02020603050405020304" pitchFamily="18" charset="0"/>
-                <a:cs typeface="Times New Roman" panose="02020603050405020304" pitchFamily="18" charset="0"/>
-              </a:rPr>
-              <a:t>	// ?</a:t>
-            </a:r>
-          </a:p>
-          <a:p>
-            <a:r>
-              <a:rPr lang="en-US" sz="3600" dirty="0">
-                <a:latin typeface="Times New Roman" panose="02020603050405020304" pitchFamily="18" charset="0"/>
-                <a:cs typeface="Times New Roman" panose="02020603050405020304" pitchFamily="18" charset="0"/>
+            <a:endParaRPr lang="en-US" sz="3600" b="0" dirty="0">
+              <a:solidFill>
+                <a:srgbClr val="BBBEBF"/>
+              </a:solidFill>
+              <a:effectLst/>
+              <a:latin typeface="Consolas" panose="020B0609020204030204" pitchFamily="49" charset="0"/>
+            </a:endParaRPr>
+          </a:p>
+          <a:p>
+            <a:r>
+              <a:rPr lang="en-US" sz="3600" b="0" dirty="0">
+                <a:solidFill>
+                  <a:srgbClr val="C9D1D9"/>
+                </a:solidFill>
+                <a:effectLst/>
+                <a:latin typeface="Consolas" panose="020B0609020204030204" pitchFamily="49" charset="0"/>
+              </a:rPr>
+              <a:t>    </a:t>
+            </a:r>
+            <a:r>
+              <a:rPr lang="en-US" sz="3600" b="0" dirty="0">
+                <a:solidFill>
+                  <a:srgbClr val="8B949E"/>
+                </a:solidFill>
+                <a:effectLst/>
+                <a:latin typeface="Consolas" panose="020B0609020204030204" pitchFamily="49" charset="0"/>
+              </a:rPr>
+              <a:t>// ?</a:t>
+            </a:r>
+            <a:endParaRPr lang="en-US" sz="3600" b="0" dirty="0">
+              <a:solidFill>
+                <a:srgbClr val="BBBEBF"/>
+              </a:solidFill>
+              <a:effectLst/>
+              <a:latin typeface="Consolas" panose="020B0609020204030204" pitchFamily="49" charset="0"/>
+            </a:endParaRPr>
+          </a:p>
+          <a:p>
+            <a:r>
+              <a:rPr lang="en-US" sz="3600" b="0" dirty="0">
+                <a:solidFill>
+                  <a:srgbClr val="C9D1D9"/>
+                </a:solidFill>
+                <a:effectLst/>
+                <a:latin typeface="Consolas" panose="020B0609020204030204" pitchFamily="49" charset="0"/>
               </a:rPr>
               <a:t>}</a:t>
             </a:r>
+            <a:endParaRPr lang="en-US" sz="3600" b="0" dirty="0">
+              <a:solidFill>
+                <a:srgbClr val="BBBEBF"/>
+              </a:solidFill>
+              <a:effectLst/>
+              <a:latin typeface="Consolas" panose="020B0609020204030204" pitchFamily="49" charset="0"/>
+            </a:endParaRPr>
+          </a:p>
+          <a:p>
+            <a:br>
+              <a:rPr lang="en-US" sz="3600" b="0" dirty="0">
+                <a:solidFill>
+                  <a:srgbClr val="BBBEBF"/>
+                </a:solidFill>
+                <a:effectLst/>
+                <a:latin typeface="Consolas" panose="020B0609020204030204" pitchFamily="49" charset="0"/>
+              </a:rPr>
+            </a:br>
+            <a:endParaRPr lang="en-US" sz="3600" b="0" dirty="0">
+              <a:solidFill>
+                <a:srgbClr val="BBBEBF"/>
+              </a:solidFill>
+              <a:effectLst/>
+              <a:latin typeface="Consolas" panose="020B0609020204030204" pitchFamily="49" charset="0"/>
+            </a:endParaRPr>
           </a:p>
         </p:txBody>
       </p:sp>
@@ -6348,7 +6656,7 @@
         <p:spPr>
           <a:xfrm>
             <a:off x="8621690" y="1997839"/>
-            <a:ext cx="2523040" cy="2862322"/>
+            <a:ext cx="2523040" cy="3970318"/>
           </a:xfrm>
           <a:prstGeom prst="rect">
             <a:avLst/>
@@ -6362,62 +6670,226 @@
           <a:lstStyle/>
           <a:p>
             <a:r>
-              <a:rPr lang="en-US" sz="3600" dirty="0">
-                <a:latin typeface="Times New Roman" panose="02020603050405020304" pitchFamily="18" charset="0"/>
-                <a:cs typeface="Times New Roman" panose="02020603050405020304" pitchFamily="18" charset="0"/>
-              </a:rPr>
-              <a:t>if (-1)</a:t>
-            </a:r>
-            <a:r>
-              <a:rPr lang="ru-RU" sz="3600" dirty="0">
-                <a:latin typeface="Times New Roman" panose="02020603050405020304" pitchFamily="18" charset="0"/>
-                <a:cs typeface="Times New Roman" panose="02020603050405020304" pitchFamily="18" charset="0"/>
+              <a:rPr lang="en-US" sz="3600" b="0" dirty="0">
+                <a:solidFill>
+                  <a:srgbClr val="C586C0"/>
+                </a:solidFill>
+                <a:effectLst/>
+                <a:latin typeface="Consolas" panose="020B0609020204030204" pitchFamily="49" charset="0"/>
+              </a:rPr>
+              <a:t>if</a:t>
+            </a:r>
+            <a:r>
+              <a:rPr lang="en-US" sz="3600" b="0" dirty="0">
+                <a:solidFill>
+                  <a:srgbClr val="BBBEBF"/>
+                </a:solidFill>
+                <a:effectLst/>
+                <a:latin typeface="Consolas" panose="020B0609020204030204" pitchFamily="49" charset="0"/>
+              </a:rPr>
+              <a:t> (</a:t>
+            </a:r>
+            <a:r>
+              <a:rPr lang="en-US" sz="3600" b="0" dirty="0">
+                <a:solidFill>
+                  <a:srgbClr val="D4D4D4"/>
+                </a:solidFill>
+                <a:effectLst/>
+                <a:latin typeface="Consolas" panose="020B0609020204030204" pitchFamily="49" charset="0"/>
+              </a:rPr>
+              <a:t>-</a:t>
+            </a:r>
+            <a:r>
+              <a:rPr lang="en-US" sz="3600" b="0" dirty="0">
+                <a:solidFill>
+                  <a:srgbClr val="B5CEA8"/>
+                </a:solidFill>
+                <a:effectLst/>
+                <a:latin typeface="Consolas" panose="020B0609020204030204" pitchFamily="49" charset="0"/>
+              </a:rPr>
+              <a:t>1</a:t>
+            </a:r>
+            <a:r>
+              <a:rPr lang="en-US" sz="3600" b="0" dirty="0">
+                <a:solidFill>
+                  <a:srgbClr val="BBBEBF"/>
+                </a:solidFill>
+                <a:effectLst/>
+                <a:latin typeface="Consolas" panose="020B0609020204030204" pitchFamily="49" charset="0"/>
+              </a:rPr>
+              <a:t>) </a:t>
+            </a:r>
+            <a:r>
+              <a:rPr lang="en-US" sz="3600" b="0" dirty="0">
+                <a:solidFill>
+                  <a:srgbClr val="C9D1D9"/>
+                </a:solidFill>
+                <a:effectLst/>
+                <a:latin typeface="Consolas" panose="020B0609020204030204" pitchFamily="49" charset="0"/>
+              </a:rPr>
+              <a:t>{</a:t>
+            </a:r>
+            <a:endParaRPr lang="en-US" sz="3600" b="0" dirty="0">
+              <a:solidFill>
+                <a:srgbClr val="BBBEBF"/>
+              </a:solidFill>
+              <a:effectLst/>
+              <a:latin typeface="Consolas" panose="020B0609020204030204" pitchFamily="49" charset="0"/>
+            </a:endParaRPr>
+          </a:p>
+          <a:p>
+            <a:r>
+              <a:rPr lang="en-US" sz="3600" b="0" dirty="0">
+                <a:solidFill>
+                  <a:srgbClr val="C9D1D9"/>
+                </a:solidFill>
+                <a:effectLst/>
+                <a:latin typeface="Consolas" panose="020B0609020204030204" pitchFamily="49" charset="0"/>
+              </a:rPr>
+              <a:t>    </a:t>
+            </a:r>
+            <a:r>
+              <a:rPr lang="en-US" sz="3600" b="0" dirty="0">
+                <a:solidFill>
+                  <a:srgbClr val="8B949E"/>
+                </a:solidFill>
+                <a:effectLst/>
+                <a:latin typeface="Consolas" panose="020B0609020204030204" pitchFamily="49" charset="0"/>
+              </a:rPr>
+              <a:t>// ?</a:t>
+            </a:r>
+            <a:endParaRPr lang="en-US" sz="3600" b="0" dirty="0">
+              <a:solidFill>
+                <a:srgbClr val="BBBEBF"/>
+              </a:solidFill>
+              <a:effectLst/>
+              <a:latin typeface="Consolas" panose="020B0609020204030204" pitchFamily="49" charset="0"/>
+            </a:endParaRPr>
+          </a:p>
+          <a:p>
+            <a:r>
+              <a:rPr lang="en-US" sz="3600" b="0" dirty="0">
+                <a:solidFill>
+                  <a:srgbClr val="C9D1D9"/>
+                </a:solidFill>
+                <a:effectLst/>
+                <a:latin typeface="Consolas" panose="020B0609020204030204" pitchFamily="49" charset="0"/>
+              </a:rPr>
+              <a:t>}</a:t>
+            </a:r>
+            <a:r>
+              <a:rPr lang="en-US" sz="3600" b="0" dirty="0">
+                <a:solidFill>
+                  <a:srgbClr val="BBBEBF"/>
+                </a:solidFill>
+                <a:effectLst/>
+                <a:latin typeface="Consolas" panose="020B0609020204030204" pitchFamily="49" charset="0"/>
               </a:rPr>
               <a:t> </a:t>
             </a:r>
             <a:r>
-              <a:rPr lang="en-US" sz="3600" dirty="0">
-                <a:latin typeface="Times New Roman" panose="02020603050405020304" pitchFamily="18" charset="0"/>
-                <a:cs typeface="Times New Roman" panose="02020603050405020304" pitchFamily="18" charset="0"/>
+              <a:rPr lang="en-US" sz="3600" b="0" dirty="0">
+                <a:solidFill>
+                  <a:srgbClr val="C586C0"/>
+                </a:solidFill>
+                <a:effectLst/>
+                <a:latin typeface="Consolas" panose="020B0609020204030204" pitchFamily="49" charset="0"/>
+              </a:rPr>
+              <a:t>else</a:t>
+            </a:r>
+            <a:r>
+              <a:rPr lang="en-US" sz="3600" b="0" dirty="0">
+                <a:solidFill>
+                  <a:srgbClr val="BBBEBF"/>
+                </a:solidFill>
+                <a:effectLst/>
+                <a:latin typeface="Consolas" panose="020B0609020204030204" pitchFamily="49" charset="0"/>
+              </a:rPr>
+              <a:t> </a:t>
+            </a:r>
+            <a:r>
+              <a:rPr lang="en-US" sz="3600" b="0" dirty="0">
+                <a:solidFill>
+                  <a:srgbClr val="C9D1D9"/>
+                </a:solidFill>
+                <a:effectLst/>
+                <a:latin typeface="Consolas" panose="020B0609020204030204" pitchFamily="49" charset="0"/>
               </a:rPr>
               <a:t>{</a:t>
             </a:r>
-          </a:p>
-          <a:p>
-            <a:r>
-              <a:rPr lang="en-US" sz="3600" dirty="0">
-                <a:latin typeface="Times New Roman" panose="02020603050405020304" pitchFamily="18" charset="0"/>
-                <a:cs typeface="Times New Roman" panose="02020603050405020304" pitchFamily="18" charset="0"/>
-              </a:rPr>
-              <a:t>	// ?</a:t>
-            </a:r>
-          </a:p>
-          <a:p>
-            <a:r>
-              <a:rPr lang="en-US" sz="3600" dirty="0">
-                <a:latin typeface="Times New Roman" panose="02020603050405020304" pitchFamily="18" charset="0"/>
-                <a:cs typeface="Times New Roman" panose="02020603050405020304" pitchFamily="18" charset="0"/>
-              </a:rPr>
-              <a:t>} else {</a:t>
-            </a:r>
-          </a:p>
-          <a:p>
-            <a:r>
-              <a:rPr lang="en-US" sz="3600" dirty="0">
-                <a:latin typeface="Times New Roman" panose="02020603050405020304" pitchFamily="18" charset="0"/>
-                <a:cs typeface="Times New Roman" panose="02020603050405020304" pitchFamily="18" charset="0"/>
-              </a:rPr>
-              <a:t>	// ?</a:t>
-            </a:r>
-          </a:p>
-          <a:p>
-            <a:r>
-              <a:rPr lang="en-US" sz="3600" dirty="0">
-                <a:latin typeface="Times New Roman" panose="02020603050405020304" pitchFamily="18" charset="0"/>
-                <a:cs typeface="Times New Roman" panose="02020603050405020304" pitchFamily="18" charset="0"/>
+            <a:endParaRPr lang="en-US" sz="3600" b="0" dirty="0">
+              <a:solidFill>
+                <a:srgbClr val="BBBEBF"/>
+              </a:solidFill>
+              <a:effectLst/>
+              <a:latin typeface="Consolas" panose="020B0609020204030204" pitchFamily="49" charset="0"/>
+            </a:endParaRPr>
+          </a:p>
+          <a:p>
+            <a:r>
+              <a:rPr lang="en-US" sz="3600" b="0" dirty="0">
+                <a:solidFill>
+                  <a:srgbClr val="C9D1D9"/>
+                </a:solidFill>
+                <a:effectLst/>
+                <a:latin typeface="Consolas" panose="020B0609020204030204" pitchFamily="49" charset="0"/>
+              </a:rPr>
+              <a:t>    </a:t>
+            </a:r>
+            <a:r>
+              <a:rPr lang="en-US" sz="3600" b="0" dirty="0">
+                <a:solidFill>
+                  <a:srgbClr val="8B949E"/>
+                </a:solidFill>
+                <a:effectLst/>
+                <a:latin typeface="Consolas" panose="020B0609020204030204" pitchFamily="49" charset="0"/>
+              </a:rPr>
+              <a:t>// ?</a:t>
+            </a:r>
+            <a:endParaRPr lang="en-US" sz="3600" b="0" dirty="0">
+              <a:solidFill>
+                <a:srgbClr val="BBBEBF"/>
+              </a:solidFill>
+              <a:effectLst/>
+              <a:latin typeface="Consolas" panose="020B0609020204030204" pitchFamily="49" charset="0"/>
+            </a:endParaRPr>
+          </a:p>
+          <a:p>
+            <a:r>
+              <a:rPr lang="en-US" sz="3600" b="0" dirty="0">
+                <a:solidFill>
+                  <a:srgbClr val="C9D1D9"/>
+                </a:solidFill>
+                <a:effectLst/>
+                <a:latin typeface="Consolas" panose="020B0609020204030204" pitchFamily="49" charset="0"/>
               </a:rPr>
               <a:t>}</a:t>
             </a:r>
+            <a:endParaRPr lang="en-US" sz="3600" b="0" dirty="0">
+              <a:solidFill>
+                <a:srgbClr val="BBBEBF"/>
+              </a:solidFill>
+              <a:effectLst/>
+              <a:latin typeface="Consolas" panose="020B0609020204030204" pitchFamily="49" charset="0"/>
+            </a:endParaRPr>
+          </a:p>
+          <a:p>
+            <a:br>
+              <a:rPr lang="en-US" sz="3600" b="0" dirty="0">
+                <a:solidFill>
+                  <a:srgbClr val="BBBEBF"/>
+                </a:solidFill>
+                <a:effectLst/>
+                <a:latin typeface="Consolas" panose="020B0609020204030204" pitchFamily="49" charset="0"/>
+              </a:rPr>
+            </a:br>
+            <a:endParaRPr lang="en-US" sz="3600" b="0" dirty="0">
+              <a:solidFill>
+                <a:srgbClr val="BBBEBF"/>
+              </a:solidFill>
+              <a:effectLst/>
+              <a:latin typeface="Consolas" panose="020B0609020204030204" pitchFamily="49" charset="0"/>
+            </a:endParaRPr>
           </a:p>
         </p:txBody>
       </p:sp>
@@ -16819,65 +17291,6 @@
       </p:sp>
       <p:sp>
         <p:nvSpPr>
-          <p:cNvPr id="14" name="TextBox 13">
-            <a:extLst>
-              <a:ext uri="{FF2B5EF4-FFF2-40B4-BE49-F238E27FC236}">
-                <a16:creationId xmlns:a16="http://schemas.microsoft.com/office/drawing/2014/main" id="{EAFC2035-78E9-4A47-B4A7-E4303DF7F786}"/>
-              </a:ext>
-            </a:extLst>
-          </p:cNvPr>
-          <p:cNvSpPr txBox="1"/>
-          <p:nvPr/>
-        </p:nvSpPr>
-        <p:spPr>
-          <a:xfrm>
-            <a:off x="6884376" y="1764720"/>
-            <a:ext cx="5125758" cy="2862322"/>
-          </a:xfrm>
-          <a:prstGeom prst="rect">
-            <a:avLst/>
-          </a:prstGeom>
-          <a:noFill/>
-        </p:spPr>
-        <p:txBody>
-          <a:bodyPr wrap="square">
-            <a:spAutoFit/>
-          </a:bodyPr>
-          <a:lstStyle/>
-          <a:p>
-            <a:r>
-              <a:rPr lang="ru-RU" sz="2000" dirty="0"/>
-              <a:t>Процессор такому не обрадуется (</a:t>
-            </a:r>
-            <a:r>
-              <a:rPr lang="ru-RU" sz="2000" b="1" dirty="0"/>
-              <a:t>особенно если такое условие проверяется много раз</a:t>
-            </a:r>
-            <a:r>
-              <a:rPr lang="ru-RU" sz="2000" dirty="0"/>
-              <a:t>) и будет частенько простаивать из-за промахов, поэтому обычно </a:t>
-            </a:r>
-            <a:r>
-              <a:rPr lang="ru-RU" sz="2000" b="1" dirty="0"/>
-              <a:t>хорошим тоном</a:t>
-            </a:r>
-            <a:r>
-              <a:rPr lang="ru-RU" sz="2000" dirty="0"/>
-              <a:t> является не писать много </a:t>
-            </a:r>
-            <a:r>
-              <a:rPr lang="ru-RU" sz="2000" b="1" dirty="0"/>
-              <a:t>вложенных условий</a:t>
-            </a:r>
-            <a:r>
-              <a:rPr lang="ru-RU" sz="2000" dirty="0"/>
-              <a:t> (условия в условиях), а ограничиваться до 3-4, если выходит больше, то возможно мы делаем что-то не правильно </a:t>
-            </a:r>
-          </a:p>
-        </p:txBody>
-      </p:sp>
-      <p:sp>
-        <p:nvSpPr>
           <p:cNvPr id="17" name="TextBox 16">
             <a:extLst>
               <a:ext uri="{FF2B5EF4-FFF2-40B4-BE49-F238E27FC236}">
@@ -16995,83 +17408,6 @@
           </a:p>
         </p:txBody>
       </p:sp>
-      <p:pic>
-        <p:nvPicPr>
-          <p:cNvPr id="13314" name="Picture 2" descr="GitHub - Apps on Google Play">
-            <a:extLst>
-              <a:ext uri="{FF2B5EF4-FFF2-40B4-BE49-F238E27FC236}">
-                <a16:creationId xmlns:a16="http://schemas.microsoft.com/office/drawing/2014/main" id="{73638D15-9EFA-B53C-910B-8E549447960B}"/>
-              </a:ext>
-            </a:extLst>
-          </p:cNvPr>
-          <p:cNvPicPr>
-            <a:picLocks noChangeAspect="1" noChangeArrowheads="1"/>
-          </p:cNvPicPr>
-          <p:nvPr/>
-        </p:nvPicPr>
-        <p:blipFill>
-          <a:blip r:embed="rId3">
-            <a:extLst>
-              <a:ext uri="{28A0092B-C50C-407E-A947-70E740481C1C}">
-                <a14:useLocalDpi xmlns:a14="http://schemas.microsoft.com/office/drawing/2010/main" val="0"/>
-              </a:ext>
-            </a:extLst>
-          </a:blip>
-          <a:srcRect/>
-          <a:stretch>
-            <a:fillRect/>
-          </a:stretch>
-        </p:blipFill>
-        <p:spPr bwMode="auto">
-          <a:xfrm>
-            <a:off x="2741645" y="2761214"/>
-            <a:ext cx="3354355" cy="3354355"/>
-          </a:xfrm>
-          <a:prstGeom prst="rect">
-            <a:avLst/>
-          </a:prstGeom>
-          <a:noFill/>
-          <a:extLst>
-            <a:ext uri="{909E8E84-426E-40DD-AFC4-6F175D3DCCD1}">
-              <a14:hiddenFill xmlns:a14="http://schemas.microsoft.com/office/drawing/2010/main">
-                <a:solidFill>
-                  <a:srgbClr val="FFFFFF"/>
-                </a:solidFill>
-              </a14:hiddenFill>
-            </a:ext>
-          </a:extLst>
-        </p:spPr>
-      </p:pic>
-      <p:pic>
-        <p:nvPicPr>
-          <p:cNvPr id="4" name="Рисунок 3">
-            <a:extLst>
-              <a:ext uri="{FF2B5EF4-FFF2-40B4-BE49-F238E27FC236}">
-                <a16:creationId xmlns:a16="http://schemas.microsoft.com/office/drawing/2014/main" id="{46C90E63-E5A3-4470-AD6D-63EB1FD9D1A1}"/>
-              </a:ext>
-            </a:extLst>
-          </p:cNvPr>
-          <p:cNvPicPr>
-            <a:picLocks noChangeAspect="1"/>
-          </p:cNvPicPr>
-          <p:nvPr/>
-        </p:nvPicPr>
-        <p:blipFill>
-          <a:blip r:embed="rId4"/>
-          <a:stretch>
-            <a:fillRect/>
-          </a:stretch>
-        </p:blipFill>
-        <p:spPr>
-          <a:xfrm>
-            <a:off x="6477000" y="2805521"/>
-            <a:ext cx="3280547" cy="3265742"/>
-          </a:xfrm>
-          <a:prstGeom prst="rect">
-            <a:avLst/>
-          </a:prstGeom>
-        </p:spPr>
-      </p:pic>
       <p:sp>
         <p:nvSpPr>
           <p:cNvPr id="6" name="TextBox 5">
@@ -17107,6 +17443,36 @@
           </a:p>
         </p:txBody>
       </p:sp>
+      <p:pic>
+        <p:nvPicPr>
+          <p:cNvPr id="7" name="Рисунок 6">
+            <a:extLst>
+              <a:ext uri="{FF2B5EF4-FFF2-40B4-BE49-F238E27FC236}">
+                <a16:creationId xmlns:a16="http://schemas.microsoft.com/office/drawing/2014/main" id="{37E8D945-74A7-4032-A60A-D994CF203D1C}"/>
+              </a:ext>
+            </a:extLst>
+          </p:cNvPr>
+          <p:cNvPicPr>
+            <a:picLocks noChangeAspect="1"/>
+          </p:cNvPicPr>
+          <p:nvPr/>
+        </p:nvPicPr>
+        <p:blipFill>
+          <a:blip r:embed="rId3"/>
+          <a:stretch>
+            <a:fillRect/>
+          </a:stretch>
+        </p:blipFill>
+        <p:spPr>
+          <a:xfrm>
+            <a:off x="4437096" y="2465671"/>
+            <a:ext cx="3858627" cy="3834660"/>
+          </a:xfrm>
+          <a:prstGeom prst="rect">
+            <a:avLst/>
+          </a:prstGeom>
+        </p:spPr>
+      </p:pic>
     </p:spTree>
     <p:extLst>
       <p:ext uri="{BB962C8B-B14F-4D97-AF65-F5344CB8AC3E}">
@@ -19480,8 +19846,8 @@
         </p:blipFill>
         <p:spPr bwMode="auto">
           <a:xfrm>
-            <a:off x="7289061" y="876299"/>
-            <a:ext cx="4902939" cy="5458212"/>
+            <a:off x="7470567" y="1027912"/>
+            <a:ext cx="4721433" cy="5256150"/>
           </a:xfrm>
           <a:prstGeom prst="rect">
             <a:avLst/>
@@ -20166,14 +20532,14 @@
           <p:nvPr>
             <p:extLst>
               <p:ext uri="{D42A27DB-BD31-4B8C-83A1-F6EECF244321}">
-                <p14:modId xmlns:p14="http://schemas.microsoft.com/office/powerpoint/2010/main" val="3599932119"/>
+                <p14:modId xmlns:p14="http://schemas.microsoft.com/office/powerpoint/2010/main" val="2832107103"/>
               </p:ext>
             </p:extLst>
           </p:nvPr>
         </p:nvGraphicFramePr>
         <p:xfrm>
           <a:off x="2717798" y="2107670"/>
-          <a:ext cx="8158748" cy="3291840"/>
+          <a:ext cx="8158748" cy="3840480"/>
         </p:xfrm>
         <a:graphic>
           <a:graphicData uri="http://schemas.openxmlformats.org/drawingml/2006/table">
@@ -20257,121 +20623,346 @@
                     <a:lstStyle/>
                     <a:p>
                       <a:r>
-                        <a:rPr lang="en-US" dirty="0">
-                          <a:latin typeface="Times New Roman" panose="02020603050405020304" pitchFamily="18" charset="0"/>
-                          <a:cs typeface="Times New Roman" panose="02020603050405020304" pitchFamily="18" charset="0"/>
+                        <a:rPr lang="en-US" b="0" dirty="0">
+                          <a:solidFill>
+                            <a:srgbClr val="FF7B72"/>
+                          </a:solidFill>
+                          <a:effectLst/>
+                          <a:latin typeface="Consolas" panose="020B0609020204030204" pitchFamily="49" charset="0"/>
                         </a:rPr>
-                        <a:t>int </a:t>
+                        <a:t>int</a:t>
                       </a:r>
                       <a:r>
-                        <a:rPr lang="en-US" dirty="0" err="1">
-                          <a:latin typeface="Times New Roman" panose="02020603050405020304" pitchFamily="18" charset="0"/>
-                          <a:cs typeface="Times New Roman" panose="02020603050405020304" pitchFamily="18" charset="0"/>
+                        <a:rPr lang="en-US" b="0" dirty="0">
+                          <a:solidFill>
+                            <a:srgbClr val="BBBEBF"/>
+                          </a:solidFill>
+                          <a:effectLst/>
+                          <a:latin typeface="Consolas" panose="020B0609020204030204" pitchFamily="49" charset="0"/>
+                        </a:rPr>
+                        <a:t> </a:t>
+                      </a:r>
+                      <a:r>
+                        <a:rPr lang="en-US" b="0" dirty="0" err="1">
+                          <a:solidFill>
+                            <a:srgbClr val="BBBEBF"/>
+                          </a:solidFill>
+                          <a:effectLst/>
+                          <a:latin typeface="Consolas" panose="020B0609020204030204" pitchFamily="49" charset="0"/>
                         </a:rPr>
                         <a:t>doorCode</a:t>
                       </a:r>
                       <a:r>
-                        <a:rPr lang="en-US" dirty="0">
-                          <a:latin typeface="Times New Roman" panose="02020603050405020304" pitchFamily="18" charset="0"/>
-                          <a:cs typeface="Times New Roman" panose="02020603050405020304" pitchFamily="18" charset="0"/>
+                        <a:rPr lang="en-US" b="0" dirty="0">
+                          <a:solidFill>
+                            <a:srgbClr val="BBBEBF"/>
+                          </a:solidFill>
+                          <a:effectLst/>
+                          <a:latin typeface="Consolas" panose="020B0609020204030204" pitchFamily="49" charset="0"/>
                         </a:rPr>
-                        <a:t>  = 555;</a:t>
+                        <a:t>  </a:t>
+                      </a:r>
+                      <a:r>
+                        <a:rPr lang="en-US" b="0" dirty="0">
+                          <a:solidFill>
+                            <a:srgbClr val="D4D4D4"/>
+                          </a:solidFill>
+                          <a:effectLst/>
+                          <a:latin typeface="Consolas" panose="020B0609020204030204" pitchFamily="49" charset="0"/>
+                        </a:rPr>
+                        <a:t>=</a:t>
+                      </a:r>
+                      <a:r>
+                        <a:rPr lang="en-US" b="0" dirty="0">
+                          <a:solidFill>
+                            <a:srgbClr val="BBBEBF"/>
+                          </a:solidFill>
+                          <a:effectLst/>
+                          <a:latin typeface="Consolas" panose="020B0609020204030204" pitchFamily="49" charset="0"/>
+                        </a:rPr>
+                        <a:t> </a:t>
+                      </a:r>
+                      <a:r>
+                        <a:rPr lang="en-US" b="0" dirty="0">
+                          <a:solidFill>
+                            <a:srgbClr val="B5CEA8"/>
+                          </a:solidFill>
+                          <a:effectLst/>
+                          <a:latin typeface="Consolas" panose="020B0609020204030204" pitchFamily="49" charset="0"/>
+                        </a:rPr>
+                        <a:t>555</a:t>
+                      </a:r>
+                      <a:r>
+                        <a:rPr lang="en-US" b="0" dirty="0">
+                          <a:solidFill>
+                            <a:srgbClr val="BBBEBF"/>
+                          </a:solidFill>
+                          <a:effectLst/>
+                          <a:latin typeface="Consolas" panose="020B0609020204030204" pitchFamily="49" charset="0"/>
+                        </a:rPr>
+                        <a:t>;</a:t>
                       </a:r>
                     </a:p>
                     <a:p>
-                      <a:endParaRPr lang="en-US" dirty="0">
-                        <a:latin typeface="Times New Roman" panose="02020603050405020304" pitchFamily="18" charset="0"/>
-                        <a:cs typeface="Times New Roman" panose="02020603050405020304" pitchFamily="18" charset="0"/>
+                      <a:br>
+                        <a:rPr lang="en-US" b="0" dirty="0">
+                          <a:solidFill>
+                            <a:srgbClr val="BBBEBF"/>
+                          </a:solidFill>
+                          <a:effectLst/>
+                          <a:latin typeface="Consolas" panose="020B0609020204030204" pitchFamily="49" charset="0"/>
+                        </a:rPr>
+                      </a:br>
+                      <a:r>
+                        <a:rPr lang="en-US" b="0" dirty="0">
+                          <a:solidFill>
+                            <a:srgbClr val="C586C0"/>
+                          </a:solidFill>
+                          <a:effectLst/>
+                          <a:latin typeface="Consolas" panose="020B0609020204030204" pitchFamily="49" charset="0"/>
+                        </a:rPr>
+                        <a:t>if</a:t>
+                      </a:r>
+                      <a:r>
+                        <a:rPr lang="en-US" b="0" dirty="0">
+                          <a:solidFill>
+                            <a:srgbClr val="BBBEBF"/>
+                          </a:solidFill>
+                          <a:effectLst/>
+                          <a:latin typeface="Consolas" panose="020B0609020204030204" pitchFamily="49" charset="0"/>
+                        </a:rPr>
+                        <a:t> (</a:t>
+                      </a:r>
+                      <a:r>
+                        <a:rPr lang="en-US" b="0" dirty="0" err="1">
+                          <a:solidFill>
+                            <a:srgbClr val="BBBEBF"/>
+                          </a:solidFill>
+                          <a:effectLst/>
+                          <a:latin typeface="Consolas" panose="020B0609020204030204" pitchFamily="49" charset="0"/>
+                        </a:rPr>
+                        <a:t>doorCode</a:t>
+                      </a:r>
+                      <a:r>
+                        <a:rPr lang="en-US" b="0" dirty="0">
+                          <a:solidFill>
+                            <a:srgbClr val="BBBEBF"/>
+                          </a:solidFill>
+                          <a:effectLst/>
+                          <a:latin typeface="Consolas" panose="020B0609020204030204" pitchFamily="49" charset="0"/>
+                        </a:rPr>
+                        <a:t> </a:t>
+                      </a:r>
+                      <a:r>
+                        <a:rPr lang="en-US" b="0" dirty="0">
+                          <a:solidFill>
+                            <a:srgbClr val="D4D4D4"/>
+                          </a:solidFill>
+                          <a:effectLst/>
+                          <a:latin typeface="Consolas" panose="020B0609020204030204" pitchFamily="49" charset="0"/>
+                        </a:rPr>
+                        <a:t>==</a:t>
+                      </a:r>
+                      <a:r>
+                        <a:rPr lang="en-US" b="0" dirty="0">
+                          <a:solidFill>
+                            <a:srgbClr val="BBBEBF"/>
+                          </a:solidFill>
+                          <a:effectLst/>
+                          <a:latin typeface="Consolas" panose="020B0609020204030204" pitchFamily="49" charset="0"/>
+                        </a:rPr>
+                        <a:t> </a:t>
+                      </a:r>
+                      <a:r>
+                        <a:rPr lang="en-US" b="0" dirty="0">
+                          <a:solidFill>
+                            <a:srgbClr val="B5CEA8"/>
+                          </a:solidFill>
+                          <a:effectLst/>
+                          <a:latin typeface="Consolas" panose="020B0609020204030204" pitchFamily="49" charset="0"/>
+                        </a:rPr>
+                        <a:t>555</a:t>
+                      </a:r>
+                      <a:r>
+                        <a:rPr lang="en-US" b="0" dirty="0">
+                          <a:solidFill>
+                            <a:srgbClr val="BBBEBF"/>
+                          </a:solidFill>
+                          <a:effectLst/>
+                          <a:latin typeface="Consolas" panose="020B0609020204030204" pitchFamily="49" charset="0"/>
+                        </a:rPr>
+                        <a:t>)</a:t>
+                      </a:r>
+                    </a:p>
+                    <a:p>
+                      <a:r>
+                        <a:rPr lang="en-US" b="0" dirty="0">
+                          <a:solidFill>
+                            <a:srgbClr val="C9D1D9"/>
+                          </a:solidFill>
+                          <a:effectLst/>
+                          <a:latin typeface="Consolas" panose="020B0609020204030204" pitchFamily="49" charset="0"/>
+                        </a:rPr>
+                        <a:t>{</a:t>
+                      </a:r>
+                      <a:endParaRPr lang="en-US" b="0" dirty="0">
+                        <a:solidFill>
+                          <a:srgbClr val="BBBEBF"/>
+                        </a:solidFill>
+                        <a:effectLst/>
+                        <a:latin typeface="Consolas" panose="020B0609020204030204" pitchFamily="49" charset="0"/>
                       </a:endParaRPr>
                     </a:p>
                     <a:p>
                       <a:r>
-                        <a:rPr lang="en-US" dirty="0">
-                          <a:latin typeface="Times New Roman" panose="02020603050405020304" pitchFamily="18" charset="0"/>
-                          <a:cs typeface="Times New Roman" panose="02020603050405020304" pitchFamily="18" charset="0"/>
+                        <a:rPr lang="en-US" b="0" dirty="0">
+                          <a:solidFill>
+                            <a:srgbClr val="C9D1D9"/>
+                          </a:solidFill>
+                          <a:effectLst/>
+                          <a:latin typeface="Consolas" panose="020B0609020204030204" pitchFamily="49" charset="0"/>
                         </a:rPr>
-                        <a:t>if (</a:t>
+                        <a:t>     </a:t>
                       </a:r>
                       <a:r>
-                        <a:rPr lang="en-US" dirty="0" err="1">
-                          <a:latin typeface="Times New Roman" panose="02020603050405020304" pitchFamily="18" charset="0"/>
-                          <a:cs typeface="Times New Roman" panose="02020603050405020304" pitchFamily="18" charset="0"/>
+                        <a:rPr lang="en-US" b="0" dirty="0">
+                          <a:solidFill>
+                            <a:srgbClr val="8B949E"/>
+                          </a:solidFill>
+                          <a:effectLst/>
+                          <a:latin typeface="Consolas" panose="020B0609020204030204" pitchFamily="49" charset="0"/>
                         </a:rPr>
-                        <a:t>doorCode</a:t>
+                        <a:t>// body of if</a:t>
                       </a:r>
-                      <a:r>
-                        <a:rPr lang="en-US" dirty="0">
-                          <a:latin typeface="Times New Roman" panose="02020603050405020304" pitchFamily="18" charset="0"/>
-                          <a:cs typeface="Times New Roman" panose="02020603050405020304" pitchFamily="18" charset="0"/>
-                        </a:rPr>
-                        <a:t> == 555)</a:t>
-                      </a:r>
+                      <a:endParaRPr lang="en-US" b="0" dirty="0">
+                        <a:solidFill>
+                          <a:srgbClr val="BBBEBF"/>
+                        </a:solidFill>
+                        <a:effectLst/>
+                        <a:latin typeface="Consolas" panose="020B0609020204030204" pitchFamily="49" charset="0"/>
+                      </a:endParaRPr>
                     </a:p>
                     <a:p>
                       <a:r>
-                        <a:rPr lang="en-US" dirty="0">
-                          <a:latin typeface="Times New Roman" panose="02020603050405020304" pitchFamily="18" charset="0"/>
-                          <a:cs typeface="Times New Roman" panose="02020603050405020304" pitchFamily="18" charset="0"/>
+                        <a:rPr lang="en-US" b="0" dirty="0">
+                          <a:solidFill>
+                            <a:srgbClr val="C9D1D9"/>
+                          </a:solidFill>
+                          <a:effectLst/>
+                          <a:latin typeface="Consolas" panose="020B0609020204030204" pitchFamily="49" charset="0"/>
+                        </a:rPr>
+                        <a:t>}</a:t>
+                      </a:r>
+                      <a:endParaRPr lang="en-US" b="0" dirty="0">
+                        <a:solidFill>
+                          <a:srgbClr val="BBBEBF"/>
+                        </a:solidFill>
+                        <a:effectLst/>
+                        <a:latin typeface="Consolas" panose="020B0609020204030204" pitchFamily="49" charset="0"/>
+                      </a:endParaRPr>
+                    </a:p>
+                    <a:p>
+                      <a:r>
+                        <a:rPr lang="en-US" b="0" dirty="0">
+                          <a:solidFill>
+                            <a:srgbClr val="C586C0"/>
+                          </a:solidFill>
+                          <a:effectLst/>
+                          <a:latin typeface="Consolas" panose="020B0609020204030204" pitchFamily="49" charset="0"/>
+                        </a:rPr>
+                        <a:t>else</a:t>
+                      </a:r>
+                      <a:endParaRPr lang="en-US" b="0" dirty="0">
+                        <a:solidFill>
+                          <a:srgbClr val="BBBEBF"/>
+                        </a:solidFill>
+                        <a:effectLst/>
+                        <a:latin typeface="Consolas" panose="020B0609020204030204" pitchFamily="49" charset="0"/>
+                      </a:endParaRPr>
+                    </a:p>
+                    <a:p>
+                      <a:r>
+                        <a:rPr lang="en-US" b="0" dirty="0">
+                          <a:solidFill>
+                            <a:srgbClr val="C9D1D9"/>
+                          </a:solidFill>
+                          <a:effectLst/>
+                          <a:latin typeface="Consolas" panose="020B0609020204030204" pitchFamily="49" charset="0"/>
                         </a:rPr>
                         <a:t>{</a:t>
                       </a:r>
+                      <a:endParaRPr lang="en-US" b="0" dirty="0">
+                        <a:solidFill>
+                          <a:srgbClr val="BBBEBF"/>
+                        </a:solidFill>
+                        <a:effectLst/>
+                        <a:latin typeface="Consolas" panose="020B0609020204030204" pitchFamily="49" charset="0"/>
+                      </a:endParaRPr>
                     </a:p>
                     <a:p>
                       <a:r>
-                        <a:rPr lang="en-US" dirty="0">
-                          <a:latin typeface="Times New Roman" panose="02020603050405020304" pitchFamily="18" charset="0"/>
-                          <a:cs typeface="Times New Roman" panose="02020603050405020304" pitchFamily="18" charset="0"/>
+                        <a:rPr lang="en-US" b="0" dirty="0">
+                          <a:solidFill>
+                            <a:srgbClr val="C9D1D9"/>
+                          </a:solidFill>
+                          <a:effectLst/>
+                          <a:latin typeface="Consolas" panose="020B0609020204030204" pitchFamily="49" charset="0"/>
                         </a:rPr>
-                        <a:t>     // body of if</a:t>
+                        <a:t>    </a:t>
                       </a:r>
+                      <a:r>
+                        <a:rPr lang="en-US" b="0" dirty="0">
+                          <a:solidFill>
+                            <a:srgbClr val="8B949E"/>
+                          </a:solidFill>
+                          <a:effectLst/>
+                          <a:latin typeface="Consolas" panose="020B0609020204030204" pitchFamily="49" charset="0"/>
+                        </a:rPr>
+                        <a:t>// body of else</a:t>
+                      </a:r>
+                      <a:endParaRPr lang="en-US" b="0" dirty="0">
+                        <a:solidFill>
+                          <a:srgbClr val="BBBEBF"/>
+                        </a:solidFill>
+                        <a:effectLst/>
+                        <a:latin typeface="Consolas" panose="020B0609020204030204" pitchFamily="49" charset="0"/>
+                      </a:endParaRPr>
                     </a:p>
                     <a:p>
                       <a:r>
-                        <a:rPr lang="en-US" dirty="0">
-                          <a:latin typeface="Times New Roman" panose="02020603050405020304" pitchFamily="18" charset="0"/>
-                          <a:cs typeface="Times New Roman" panose="02020603050405020304" pitchFamily="18" charset="0"/>
+                        <a:rPr lang="en-US" b="0" dirty="0">
+                          <a:solidFill>
+                            <a:srgbClr val="C9D1D9"/>
+                          </a:solidFill>
+                          <a:effectLst/>
+                          <a:latin typeface="Consolas" panose="020B0609020204030204" pitchFamily="49" charset="0"/>
                         </a:rPr>
                         <a:t>}</a:t>
                       </a:r>
+                      <a:endParaRPr lang="en-US" b="0" dirty="0">
+                        <a:solidFill>
+                          <a:srgbClr val="BBBEBF"/>
+                        </a:solidFill>
+                        <a:effectLst/>
+                        <a:latin typeface="Consolas" panose="020B0609020204030204" pitchFamily="49" charset="0"/>
+                      </a:endParaRPr>
                     </a:p>
                     <a:p>
-                      <a:r>
-                        <a:rPr lang="en-US" dirty="0">
-                          <a:latin typeface="Times New Roman" panose="02020603050405020304" pitchFamily="18" charset="0"/>
-                          <a:cs typeface="Times New Roman" panose="02020603050405020304" pitchFamily="18" charset="0"/>
+                      <a:br>
+                        <a:rPr lang="en-US" b="0" dirty="0">
+                          <a:solidFill>
+                            <a:srgbClr val="BBBEBF"/>
+                          </a:solidFill>
+                          <a:effectLst/>
+                          <a:latin typeface="Consolas" panose="020B0609020204030204" pitchFamily="49" charset="0"/>
                         </a:rPr>
-                        <a:t>else</a:t>
-                      </a:r>
-                    </a:p>
-                    <a:p>
-                      <a:r>
-                        <a:rPr lang="en-US" dirty="0">
-                          <a:latin typeface="Times New Roman" panose="02020603050405020304" pitchFamily="18" charset="0"/>
-                          <a:cs typeface="Times New Roman" panose="02020603050405020304" pitchFamily="18" charset="0"/>
-                        </a:rPr>
-                        <a:t>{</a:t>
-                      </a:r>
-                    </a:p>
-                    <a:p>
-                      <a:r>
-                        <a:rPr lang="en-US" dirty="0">
-                          <a:latin typeface="Times New Roman" panose="02020603050405020304" pitchFamily="18" charset="0"/>
-                          <a:cs typeface="Times New Roman" panose="02020603050405020304" pitchFamily="18" charset="0"/>
-                        </a:rPr>
-                        <a:t>    // body of else</a:t>
-                      </a:r>
-                    </a:p>
-                    <a:p>
-                      <a:r>
-                        <a:rPr lang="en-US" dirty="0">
-                          <a:latin typeface="Times New Roman" panose="02020603050405020304" pitchFamily="18" charset="0"/>
-                          <a:cs typeface="Times New Roman" panose="02020603050405020304" pitchFamily="18" charset="0"/>
-                        </a:rPr>
-                        <a:t>}</a:t>
-                      </a:r>
-                      <a:endParaRPr lang="ru-RU" dirty="0">
-                        <a:latin typeface="Times New Roman" panose="02020603050405020304" pitchFamily="18" charset="0"/>
-                        <a:cs typeface="Times New Roman" panose="02020603050405020304" pitchFamily="18" charset="0"/>
+                      </a:br>
+                      <a:endParaRPr lang="en-US" b="0" dirty="0">
+                        <a:solidFill>
+                          <a:srgbClr val="BBBEBF"/>
+                        </a:solidFill>
+                        <a:effectLst/>
+                        <a:latin typeface="Consolas" panose="020B0609020204030204" pitchFamily="49" charset="0"/>
                       </a:endParaRPr>
                     </a:p>
                   </a:txBody>
@@ -20383,121 +20974,346 @@
                     <a:lstStyle/>
                     <a:p>
                       <a:r>
-                        <a:rPr lang="en-US" dirty="0">
-                          <a:latin typeface="Times New Roman" panose="02020603050405020304" pitchFamily="18" charset="0"/>
-                          <a:cs typeface="Times New Roman" panose="02020603050405020304" pitchFamily="18" charset="0"/>
+                        <a:rPr lang="en-US" b="0" dirty="0">
+                          <a:solidFill>
+                            <a:srgbClr val="FF7B72"/>
+                          </a:solidFill>
+                          <a:effectLst/>
+                          <a:latin typeface="Consolas" panose="020B0609020204030204" pitchFamily="49" charset="0"/>
                         </a:rPr>
-                        <a:t>int </a:t>
+                        <a:t>int</a:t>
                       </a:r>
                       <a:r>
-                        <a:rPr lang="en-US" dirty="0" err="1">
-                          <a:latin typeface="Times New Roman" panose="02020603050405020304" pitchFamily="18" charset="0"/>
-                          <a:cs typeface="Times New Roman" panose="02020603050405020304" pitchFamily="18" charset="0"/>
+                        <a:rPr lang="en-US" b="0" dirty="0">
+                          <a:solidFill>
+                            <a:srgbClr val="BBBEBF"/>
+                          </a:solidFill>
+                          <a:effectLst/>
+                          <a:latin typeface="Consolas" panose="020B0609020204030204" pitchFamily="49" charset="0"/>
+                        </a:rPr>
+                        <a:t> </a:t>
+                      </a:r>
+                      <a:r>
+                        <a:rPr lang="en-US" b="0" dirty="0" err="1">
+                          <a:solidFill>
+                            <a:srgbClr val="BBBEBF"/>
+                          </a:solidFill>
+                          <a:effectLst/>
+                          <a:latin typeface="Consolas" panose="020B0609020204030204" pitchFamily="49" charset="0"/>
                         </a:rPr>
                         <a:t>doorCode</a:t>
                       </a:r>
                       <a:r>
-                        <a:rPr lang="en-US" dirty="0">
-                          <a:latin typeface="Times New Roman" panose="02020603050405020304" pitchFamily="18" charset="0"/>
-                          <a:cs typeface="Times New Roman" panose="02020603050405020304" pitchFamily="18" charset="0"/>
+                        <a:rPr lang="en-US" b="0" dirty="0">
+                          <a:solidFill>
+                            <a:srgbClr val="BBBEBF"/>
+                          </a:solidFill>
+                          <a:effectLst/>
+                          <a:latin typeface="Consolas" panose="020B0609020204030204" pitchFamily="49" charset="0"/>
                         </a:rPr>
-                        <a:t>  = 123;</a:t>
+                        <a:t>  </a:t>
+                      </a:r>
+                      <a:r>
+                        <a:rPr lang="en-US" b="0" dirty="0">
+                          <a:solidFill>
+                            <a:srgbClr val="D4D4D4"/>
+                          </a:solidFill>
+                          <a:effectLst/>
+                          <a:latin typeface="Consolas" panose="020B0609020204030204" pitchFamily="49" charset="0"/>
+                        </a:rPr>
+                        <a:t>=</a:t>
+                      </a:r>
+                      <a:r>
+                        <a:rPr lang="en-US" b="0" dirty="0">
+                          <a:solidFill>
+                            <a:srgbClr val="BBBEBF"/>
+                          </a:solidFill>
+                          <a:effectLst/>
+                          <a:latin typeface="Consolas" panose="020B0609020204030204" pitchFamily="49" charset="0"/>
+                        </a:rPr>
+                        <a:t> </a:t>
+                      </a:r>
+                      <a:r>
+                        <a:rPr lang="en-US" b="0" dirty="0">
+                          <a:solidFill>
+                            <a:srgbClr val="B5CEA8"/>
+                          </a:solidFill>
+                          <a:effectLst/>
+                          <a:latin typeface="Consolas" panose="020B0609020204030204" pitchFamily="49" charset="0"/>
+                        </a:rPr>
+                        <a:t>123</a:t>
+                      </a:r>
+                      <a:r>
+                        <a:rPr lang="en-US" b="0" dirty="0">
+                          <a:solidFill>
+                            <a:srgbClr val="BBBEBF"/>
+                          </a:solidFill>
+                          <a:effectLst/>
+                          <a:latin typeface="Consolas" panose="020B0609020204030204" pitchFamily="49" charset="0"/>
+                        </a:rPr>
+                        <a:t>;</a:t>
                       </a:r>
                     </a:p>
                     <a:p>
-                      <a:endParaRPr lang="en-US" dirty="0">
-                        <a:latin typeface="Times New Roman" panose="02020603050405020304" pitchFamily="18" charset="0"/>
-                        <a:cs typeface="Times New Roman" panose="02020603050405020304" pitchFamily="18" charset="0"/>
+                      <a:br>
+                        <a:rPr lang="en-US" b="0" dirty="0">
+                          <a:solidFill>
+                            <a:srgbClr val="BBBEBF"/>
+                          </a:solidFill>
+                          <a:effectLst/>
+                          <a:latin typeface="Consolas" panose="020B0609020204030204" pitchFamily="49" charset="0"/>
+                        </a:rPr>
+                      </a:br>
+                      <a:r>
+                        <a:rPr lang="en-US" b="0" dirty="0">
+                          <a:solidFill>
+                            <a:srgbClr val="C586C0"/>
+                          </a:solidFill>
+                          <a:effectLst/>
+                          <a:latin typeface="Consolas" panose="020B0609020204030204" pitchFamily="49" charset="0"/>
+                        </a:rPr>
+                        <a:t>if</a:t>
+                      </a:r>
+                      <a:r>
+                        <a:rPr lang="en-US" b="0" dirty="0">
+                          <a:solidFill>
+                            <a:srgbClr val="BBBEBF"/>
+                          </a:solidFill>
+                          <a:effectLst/>
+                          <a:latin typeface="Consolas" panose="020B0609020204030204" pitchFamily="49" charset="0"/>
+                        </a:rPr>
+                        <a:t> (</a:t>
+                      </a:r>
+                      <a:r>
+                        <a:rPr lang="en-US" b="0" dirty="0" err="1">
+                          <a:solidFill>
+                            <a:srgbClr val="BBBEBF"/>
+                          </a:solidFill>
+                          <a:effectLst/>
+                          <a:latin typeface="Consolas" panose="020B0609020204030204" pitchFamily="49" charset="0"/>
+                        </a:rPr>
+                        <a:t>doorCode</a:t>
+                      </a:r>
+                      <a:r>
+                        <a:rPr lang="en-US" b="0" dirty="0">
+                          <a:solidFill>
+                            <a:srgbClr val="BBBEBF"/>
+                          </a:solidFill>
+                          <a:effectLst/>
+                          <a:latin typeface="Consolas" panose="020B0609020204030204" pitchFamily="49" charset="0"/>
+                        </a:rPr>
+                        <a:t> </a:t>
+                      </a:r>
+                      <a:r>
+                        <a:rPr lang="en-US" b="0" dirty="0">
+                          <a:solidFill>
+                            <a:srgbClr val="D4D4D4"/>
+                          </a:solidFill>
+                          <a:effectLst/>
+                          <a:latin typeface="Consolas" panose="020B0609020204030204" pitchFamily="49" charset="0"/>
+                        </a:rPr>
+                        <a:t>==</a:t>
+                      </a:r>
+                      <a:r>
+                        <a:rPr lang="en-US" b="0" dirty="0">
+                          <a:solidFill>
+                            <a:srgbClr val="BBBEBF"/>
+                          </a:solidFill>
+                          <a:effectLst/>
+                          <a:latin typeface="Consolas" panose="020B0609020204030204" pitchFamily="49" charset="0"/>
+                        </a:rPr>
+                        <a:t> </a:t>
+                      </a:r>
+                      <a:r>
+                        <a:rPr lang="en-US" b="0" dirty="0">
+                          <a:solidFill>
+                            <a:srgbClr val="B5CEA8"/>
+                          </a:solidFill>
+                          <a:effectLst/>
+                          <a:latin typeface="Consolas" panose="020B0609020204030204" pitchFamily="49" charset="0"/>
+                        </a:rPr>
+                        <a:t>555</a:t>
+                      </a:r>
+                      <a:r>
+                        <a:rPr lang="en-US" b="0" dirty="0">
+                          <a:solidFill>
+                            <a:srgbClr val="BBBEBF"/>
+                          </a:solidFill>
+                          <a:effectLst/>
+                          <a:latin typeface="Consolas" panose="020B0609020204030204" pitchFamily="49" charset="0"/>
+                        </a:rPr>
+                        <a:t>)</a:t>
+                      </a:r>
+                    </a:p>
+                    <a:p>
+                      <a:r>
+                        <a:rPr lang="en-US" b="0" dirty="0">
+                          <a:solidFill>
+                            <a:srgbClr val="C9D1D9"/>
+                          </a:solidFill>
+                          <a:effectLst/>
+                          <a:latin typeface="Consolas" panose="020B0609020204030204" pitchFamily="49" charset="0"/>
+                        </a:rPr>
+                        <a:t>{</a:t>
+                      </a:r>
+                      <a:endParaRPr lang="en-US" b="0" dirty="0">
+                        <a:solidFill>
+                          <a:srgbClr val="BBBEBF"/>
+                        </a:solidFill>
+                        <a:effectLst/>
+                        <a:latin typeface="Consolas" panose="020B0609020204030204" pitchFamily="49" charset="0"/>
                       </a:endParaRPr>
                     </a:p>
                     <a:p>
                       <a:r>
-                        <a:rPr lang="en-US" dirty="0">
-                          <a:latin typeface="Times New Roman" panose="02020603050405020304" pitchFamily="18" charset="0"/>
-                          <a:cs typeface="Times New Roman" panose="02020603050405020304" pitchFamily="18" charset="0"/>
+                        <a:rPr lang="en-US" b="0" dirty="0">
+                          <a:solidFill>
+                            <a:srgbClr val="C9D1D9"/>
+                          </a:solidFill>
+                          <a:effectLst/>
+                          <a:latin typeface="Consolas" panose="020B0609020204030204" pitchFamily="49" charset="0"/>
                         </a:rPr>
-                        <a:t>if (</a:t>
+                        <a:t>     </a:t>
                       </a:r>
                       <a:r>
-                        <a:rPr lang="en-US" dirty="0" err="1">
-                          <a:latin typeface="Times New Roman" panose="02020603050405020304" pitchFamily="18" charset="0"/>
-                          <a:cs typeface="Times New Roman" panose="02020603050405020304" pitchFamily="18" charset="0"/>
+                        <a:rPr lang="en-US" b="0" dirty="0">
+                          <a:solidFill>
+                            <a:srgbClr val="8B949E"/>
+                          </a:solidFill>
+                          <a:effectLst/>
+                          <a:latin typeface="Consolas" panose="020B0609020204030204" pitchFamily="49" charset="0"/>
                         </a:rPr>
-                        <a:t>doorCode</a:t>
+                        <a:t>// body of if</a:t>
                       </a:r>
-                      <a:r>
-                        <a:rPr lang="en-US" dirty="0">
-                          <a:latin typeface="Times New Roman" panose="02020603050405020304" pitchFamily="18" charset="0"/>
-                          <a:cs typeface="Times New Roman" panose="02020603050405020304" pitchFamily="18" charset="0"/>
-                        </a:rPr>
-                        <a:t> == 555)</a:t>
-                      </a:r>
+                      <a:endParaRPr lang="en-US" b="0" dirty="0">
+                        <a:solidFill>
+                          <a:srgbClr val="BBBEBF"/>
+                        </a:solidFill>
+                        <a:effectLst/>
+                        <a:latin typeface="Consolas" panose="020B0609020204030204" pitchFamily="49" charset="0"/>
+                      </a:endParaRPr>
                     </a:p>
                     <a:p>
                       <a:r>
-                        <a:rPr lang="en-US" dirty="0">
-                          <a:latin typeface="Times New Roman" panose="02020603050405020304" pitchFamily="18" charset="0"/>
-                          <a:cs typeface="Times New Roman" panose="02020603050405020304" pitchFamily="18" charset="0"/>
+                        <a:rPr lang="en-US" b="0" dirty="0">
+                          <a:solidFill>
+                            <a:srgbClr val="C9D1D9"/>
+                          </a:solidFill>
+                          <a:effectLst/>
+                          <a:latin typeface="Consolas" panose="020B0609020204030204" pitchFamily="49" charset="0"/>
+                        </a:rPr>
+                        <a:t>}</a:t>
+                      </a:r>
+                      <a:endParaRPr lang="en-US" b="0" dirty="0">
+                        <a:solidFill>
+                          <a:srgbClr val="BBBEBF"/>
+                        </a:solidFill>
+                        <a:effectLst/>
+                        <a:latin typeface="Consolas" panose="020B0609020204030204" pitchFamily="49" charset="0"/>
+                      </a:endParaRPr>
+                    </a:p>
+                    <a:p>
+                      <a:r>
+                        <a:rPr lang="en-US" b="0" dirty="0">
+                          <a:solidFill>
+                            <a:srgbClr val="C586C0"/>
+                          </a:solidFill>
+                          <a:effectLst/>
+                          <a:latin typeface="Consolas" panose="020B0609020204030204" pitchFamily="49" charset="0"/>
+                        </a:rPr>
+                        <a:t>else</a:t>
+                      </a:r>
+                      <a:endParaRPr lang="en-US" b="0" dirty="0">
+                        <a:solidFill>
+                          <a:srgbClr val="BBBEBF"/>
+                        </a:solidFill>
+                        <a:effectLst/>
+                        <a:latin typeface="Consolas" panose="020B0609020204030204" pitchFamily="49" charset="0"/>
+                      </a:endParaRPr>
+                    </a:p>
+                    <a:p>
+                      <a:r>
+                        <a:rPr lang="en-US" b="0" dirty="0">
+                          <a:solidFill>
+                            <a:srgbClr val="C9D1D9"/>
+                          </a:solidFill>
+                          <a:effectLst/>
+                          <a:latin typeface="Consolas" panose="020B0609020204030204" pitchFamily="49" charset="0"/>
                         </a:rPr>
                         <a:t>{</a:t>
                       </a:r>
+                      <a:endParaRPr lang="en-US" b="0" dirty="0">
+                        <a:solidFill>
+                          <a:srgbClr val="BBBEBF"/>
+                        </a:solidFill>
+                        <a:effectLst/>
+                        <a:latin typeface="Consolas" panose="020B0609020204030204" pitchFamily="49" charset="0"/>
+                      </a:endParaRPr>
                     </a:p>
                     <a:p>
                       <a:r>
-                        <a:rPr lang="en-US" dirty="0">
-                          <a:latin typeface="Times New Roman" panose="02020603050405020304" pitchFamily="18" charset="0"/>
-                          <a:cs typeface="Times New Roman" panose="02020603050405020304" pitchFamily="18" charset="0"/>
+                        <a:rPr lang="en-US" b="0" dirty="0">
+                          <a:solidFill>
+                            <a:srgbClr val="C9D1D9"/>
+                          </a:solidFill>
+                          <a:effectLst/>
+                          <a:latin typeface="Consolas" panose="020B0609020204030204" pitchFamily="49" charset="0"/>
                         </a:rPr>
-                        <a:t>     // body of if</a:t>
+                        <a:t>    </a:t>
                       </a:r>
+                      <a:r>
+                        <a:rPr lang="en-US" b="0" dirty="0">
+                          <a:solidFill>
+                            <a:srgbClr val="8B949E"/>
+                          </a:solidFill>
+                          <a:effectLst/>
+                          <a:latin typeface="Consolas" panose="020B0609020204030204" pitchFamily="49" charset="0"/>
+                        </a:rPr>
+                        <a:t>// body of else</a:t>
+                      </a:r>
+                      <a:endParaRPr lang="en-US" b="0" dirty="0">
+                        <a:solidFill>
+                          <a:srgbClr val="BBBEBF"/>
+                        </a:solidFill>
+                        <a:effectLst/>
+                        <a:latin typeface="Consolas" panose="020B0609020204030204" pitchFamily="49" charset="0"/>
+                      </a:endParaRPr>
                     </a:p>
                     <a:p>
                       <a:r>
-                        <a:rPr lang="en-US" dirty="0">
-                          <a:latin typeface="Times New Roman" panose="02020603050405020304" pitchFamily="18" charset="0"/>
-                          <a:cs typeface="Times New Roman" panose="02020603050405020304" pitchFamily="18" charset="0"/>
+                        <a:rPr lang="en-US" b="0" dirty="0">
+                          <a:solidFill>
+                            <a:srgbClr val="C9D1D9"/>
+                          </a:solidFill>
+                          <a:effectLst/>
+                          <a:latin typeface="Consolas" panose="020B0609020204030204" pitchFamily="49" charset="0"/>
                         </a:rPr>
                         <a:t>}</a:t>
                       </a:r>
+                      <a:endParaRPr lang="en-US" b="0" dirty="0">
+                        <a:solidFill>
+                          <a:srgbClr val="BBBEBF"/>
+                        </a:solidFill>
+                        <a:effectLst/>
+                        <a:latin typeface="Consolas" panose="020B0609020204030204" pitchFamily="49" charset="0"/>
+                      </a:endParaRPr>
                     </a:p>
                     <a:p>
-                      <a:r>
-                        <a:rPr lang="en-US" dirty="0">
-                          <a:latin typeface="Times New Roman" panose="02020603050405020304" pitchFamily="18" charset="0"/>
-                          <a:cs typeface="Times New Roman" panose="02020603050405020304" pitchFamily="18" charset="0"/>
+                      <a:br>
+                        <a:rPr lang="en-US" b="0" dirty="0">
+                          <a:solidFill>
+                            <a:srgbClr val="BBBEBF"/>
+                          </a:solidFill>
+                          <a:effectLst/>
+                          <a:latin typeface="Consolas" panose="020B0609020204030204" pitchFamily="49" charset="0"/>
                         </a:rPr>
-                        <a:t>else</a:t>
-                      </a:r>
-                    </a:p>
-                    <a:p>
-                      <a:r>
-                        <a:rPr lang="en-US" dirty="0">
-                          <a:latin typeface="Times New Roman" panose="02020603050405020304" pitchFamily="18" charset="0"/>
-                          <a:cs typeface="Times New Roman" panose="02020603050405020304" pitchFamily="18" charset="0"/>
-                        </a:rPr>
-                        <a:t>{</a:t>
-                      </a:r>
-                    </a:p>
-                    <a:p>
-                      <a:r>
-                        <a:rPr lang="en-US" dirty="0">
-                          <a:latin typeface="Times New Roman" panose="02020603050405020304" pitchFamily="18" charset="0"/>
-                          <a:cs typeface="Times New Roman" panose="02020603050405020304" pitchFamily="18" charset="0"/>
-                        </a:rPr>
-                        <a:t>    // body of else</a:t>
-                      </a:r>
-                    </a:p>
-                    <a:p>
-                      <a:r>
-                        <a:rPr lang="en-US" dirty="0">
-                          <a:latin typeface="Times New Roman" panose="02020603050405020304" pitchFamily="18" charset="0"/>
-                          <a:cs typeface="Times New Roman" panose="02020603050405020304" pitchFamily="18" charset="0"/>
-                        </a:rPr>
-                        <a:t>}</a:t>
-                      </a:r>
-                      <a:endParaRPr lang="ru-RU" dirty="0">
-                        <a:latin typeface="Times New Roman" panose="02020603050405020304" pitchFamily="18" charset="0"/>
-                        <a:cs typeface="Times New Roman" panose="02020603050405020304" pitchFamily="18" charset="0"/>
+                      </a:br>
+                      <a:endParaRPr lang="en-US" b="0" dirty="0">
+                        <a:solidFill>
+                          <a:srgbClr val="BBBEBF"/>
+                        </a:solidFill>
+                        <a:effectLst/>
+                        <a:latin typeface="Consolas" panose="020B0609020204030204" pitchFamily="49" charset="0"/>
                       </a:endParaRPr>
                     </a:p>
                   </a:txBody>
